--- a/assets/ppts/M3.9_Linux_Raw_Sockets_PF_PACKET.pptx
+++ b/assets/ppts/M3.9_Linux_Raw_Sockets_PF_PACKET.pptx
@@ -7,6 +7,7 @@
   <p:sldIdLst>
     <p:sldId id="256" r:id="rId7"/>
     <p:sldId id="257" r:id="rId8"/>
+    <p:sldId id="258" r:id="rId9"/>
   </p:sldIdLst>
   <p:sldSz cx="12191695" cy="6858000" type="screen4x3"/>
   <p:notesSz cx="6858000" cy="9144000"/>
@@ -3140,8 +3141,8 @@
         </p:nvSpPr>
         <p:spPr>
           <a:xfrm>
-            <a:off x="822960" y="1188720"/>
-            <a:ext cx="164592" cy="4480560"/>
+            <a:off x="0" y="0"/>
+            <a:ext cx="12191695" cy="137160"/>
           </a:xfrm>
           <a:prstGeom prst="rect">
             <a:avLst/>
@@ -3177,14 +3178,57 @@
       </p:sp>
       <p:sp>
         <p:nvSpPr>
-          <p:cNvPr id="4" name="TextBox 3"/>
+          <p:cNvPr id="4" name="Rectangle 3"/>
+          <p:cNvSpPr/>
+          <p:nvPr/>
+        </p:nvSpPr>
+        <p:spPr>
+          <a:xfrm>
+            <a:off x="822960" y="1097280"/>
+            <a:ext cx="164592" cy="4663440"/>
+          </a:xfrm>
+          <a:prstGeom prst="rect">
+            <a:avLst/>
+          </a:prstGeom>
+          <a:solidFill>
+            <a:srgbClr val="D97706"/>
+          </a:solidFill>
+          <a:ln>
+            <a:noFill/>
+          </a:ln>
+        </p:spPr>
+        <p:style>
+          <a:lnRef idx="1">
+            <a:schemeClr val="accent1"/>
+          </a:lnRef>
+          <a:fillRef idx="3">
+            <a:schemeClr val="accent1"/>
+          </a:fillRef>
+          <a:effectRef idx="2">
+            <a:schemeClr val="accent1"/>
+          </a:effectRef>
+          <a:fontRef idx="minor">
+            <a:schemeClr val="lt1"/>
+          </a:fontRef>
+        </p:style>
+        <p:txBody>
+          <a:bodyPr rtlCol="0" anchor="ctr"/>
+          <a:lstStyle/>
+          <a:p>
+            <a:pPr algn="ctr"/>
+          </a:p>
+        </p:txBody>
+      </p:sp>
+      <p:sp>
+        <p:nvSpPr>
+          <p:cNvPr id="5" name="TextBox 4"/>
           <p:cNvSpPr txBox="1"/>
           <p:nvPr/>
         </p:nvSpPr>
         <p:spPr>
           <a:xfrm>
-            <a:off x="1280160" y="1097280"/>
-            <a:ext cx="10058400" cy="4663440"/>
+            <a:off x="1234440" y="1005840"/>
+            <a:ext cx="10241280" cy="4846320"/>
           </a:xfrm>
           <a:prstGeom prst="rect">
             <a:avLst/>
@@ -3199,70 +3243,165 @@
           <a:p>
             <a:pPr>
               <a:spcAft>
+                <a:spcPts val="1000"/>
+              </a:spcAft>
+              <a:defRPr b="1" sz="1300">
+                <a:solidFill>
+                  <a:srgbClr val="D97706"/>
+                </a:solidFill>
+              </a:defRPr>
+            </a:pPr>
+            <a:r>
+              <a:t>PCCST501 Computer Networks | KTU 2024 Scheme • MODULE 3 • M3.9</a:t>
+            </a:r>
+          </a:p>
+          <a:p>
+            <a:pPr>
+              <a:spcAft>
                 <a:spcPts val="1200"/>
               </a:spcAft>
-              <a:defRPr b="1" sz="1300">
-                <a:solidFill>
-                  <a:srgbClr val="D97706"/>
+              <a:defRPr b="1" sz="3000">
+                <a:solidFill>
+                  <a:srgbClr val="F8FAFC"/>
                 </a:solidFill>
               </a:defRPr>
             </a:pPr>
             <a:r>
-              <a:t>PCCST501 Computer Networks | KTU 2024 Scheme • MODULE 3 • M3.9</a:t>
+              <a:t>Linux Network Programming: Raw Sockets &amp; PF_PACKET</a:t>
             </a:r>
           </a:p>
           <a:p>
             <a:pPr>
               <a:spcAft>
-                <a:spcPts val="1400"/>
+                <a:spcPts val="2400"/>
               </a:spcAft>
-              <a:defRPr b="1" sz="3200">
-                <a:solidFill>
-                  <a:srgbClr val="F8FAFC"/>
+              <a:defRPr sz="1600">
+                <a:solidFill>
+                  <a:srgbClr val="94A3B8"/>
                 </a:solidFill>
               </a:defRPr>
             </a:pPr>
             <a:r>
-              <a:t>Linux Raw Socket Link Layer Programming</a:t>
+              <a:t>Data Link Provider Interface (DLPI), BSD Packet Filter (BPF), Linux PF_PACKET / AF_PACKET (SOCK_RAW, ETH_P_ALL), Promiscuous Sniffer</a:t>
             </a:r>
           </a:p>
           <a:p>
             <a:pPr>
               <a:spcAft>
-                <a:spcPts val="2800"/>
+                <a:spcPts val="300"/>
               </a:spcAft>
-              <a:defRPr sz="1700">
+              <a:defRPr b="1" sz="1350">
+                <a:solidFill>
+                  <a:srgbClr val="E2E8F0"/>
+                </a:solidFill>
+              </a:defRPr>
+            </a:pPr>
+            <a:r>
+              <a:t>Prepared by: Prof. Anju Markose | Assistant Professor, Dept. of CSE | VJCET</a:t>
+            </a:r>
+          </a:p>
+          <a:p>
+            <a:pPr>
+              <a:defRPr sz="1150">
                 <a:solidFill>
                   <a:srgbClr val="94A3B8"/>
                 </a:solidFill>
               </a:defRPr>
             </a:pPr>
             <a:r>
-              <a:t>Datalink Provider Interface, SOCK_PACKET vs PF_PACKET, struct sockaddr_ll &amp; Custom Frame Sniffing</a:t>
-            </a:r>
-          </a:p>
+              <a:t>Viswajyothi College of Engineering and Technology (VJCET), Vazhakulam • KTU S5 CSE</a:t>
+            </a:r>
+          </a:p>
+        </p:txBody>
+      </p:sp>
+      <p:sp>
+        <p:nvSpPr>
+          <p:cNvPr id="6" name="Rounded Rectangle 5"/>
+          <p:cNvSpPr/>
+          <p:nvPr/>
+        </p:nvSpPr>
+        <p:spPr>
+          <a:xfrm>
+            <a:off x="8412480" y="5120640"/>
+            <a:ext cx="3017520" cy="822960"/>
+          </a:xfrm>
+          <a:prstGeom prst="roundRect">
+            <a:avLst/>
+          </a:prstGeom>
+          <a:solidFill>
+            <a:srgbClr val="1E293B"/>
+          </a:solidFill>
+          <a:ln w="12700">
+            <a:solidFill>
+              <a:srgbClr val="0E7490"/>
+            </a:solidFill>
+          </a:ln>
+        </p:spPr>
+        <p:style>
+          <a:lnRef idx="1">
+            <a:schemeClr val="accent1"/>
+          </a:lnRef>
+          <a:fillRef idx="3">
+            <a:schemeClr val="accent1"/>
+          </a:fillRef>
+          <a:effectRef idx="2">
+            <a:schemeClr val="accent1"/>
+          </a:effectRef>
+          <a:fontRef idx="minor">
+            <a:schemeClr val="lt1"/>
+          </a:fontRef>
+        </p:style>
+        <p:txBody>
+          <a:bodyPr rtlCol="0" anchor="ctr"/>
+          <a:lstStyle/>
+          <a:p>
+            <a:pPr algn="ctr"/>
+          </a:p>
+        </p:txBody>
+      </p:sp>
+      <p:sp>
+        <p:nvSpPr>
+          <p:cNvPr id="7" name="TextBox 6"/>
+          <p:cNvSpPr txBox="1"/>
+          <p:nvPr/>
+        </p:nvSpPr>
+        <p:spPr>
+          <a:xfrm>
+            <a:off x="8503920" y="5166360"/>
+            <a:ext cx="2834640" cy="731520"/>
+          </a:xfrm>
+          <a:prstGeom prst="rect">
+            <a:avLst/>
+          </a:prstGeom>
+          <a:noFill/>
+        </p:spPr>
+        <p:txBody>
+          <a:bodyPr wrap="none">
+            <a:spAutoFit/>
+          </a:bodyPr>
+          <a:lstStyle/>
           <a:p>
             <a:pPr>
-              <a:defRPr b="1" sz="1300">
-                <a:solidFill>
-                  <a:srgbClr val="E2E8F0"/>
+              <a:defRPr b="1" sz="1050">
+                <a:solidFill>
+                  <a:srgbClr val="D97706"/>
                 </a:solidFill>
               </a:defRPr>
             </a:pPr>
             <a:r>
-              <a:t>Prepared by: Prof. Anju Markose | Assistant Professor, Dept. of CSE | VJCET</a:t>
+              <a:t>KTU B.Tech Curriculum</a:t>
             </a:r>
           </a:p>
           <a:p>
             <a:pPr>
-              <a:defRPr sz="1100">
-                <a:solidFill>
-                  <a:srgbClr val="94A3B8"/>
+              <a:defRPr sz="950">
+                <a:solidFill>
+                  <a:srgbClr val="F8FAFC"/>
                 </a:solidFill>
               </a:defRPr>
             </a:pPr>
             <a:r>
-              <a:t>Viswajyothi College of Engineering and Technology (VJCET), Vazhakulam</a:t>
+              <a:t>Official Classroom Slide Deck</a:t>
             </a:r>
           </a:p>
         </p:txBody>
@@ -3394,14 +3533,14 @@
           <a:lstStyle/>
           <a:p>
             <a:pPr>
-              <a:defRPr b="1" sz="2300">
+              <a:defRPr b="1" sz="2200">
                 <a:solidFill>
                   <a:srgbClr val="F8FAFC"/>
                 </a:solidFill>
               </a:defRPr>
             </a:pPr>
             <a:r>
-              <a:t>3.9.1 Linux Raw Sockets &amp; PF_PACKET Interface</a:t>
+              <a:t>3.9.1 Hands-On: Packet Sniffing with Linux `PF_PACKET`</a:t>
             </a:r>
           </a:p>
         </p:txBody>
@@ -3443,163 +3582,20 @@
       </p:sp>
       <p:sp>
         <p:nvSpPr>
-          <p:cNvPr id="6" name="TextBox 5"/>
-          <p:cNvSpPr txBox="1"/>
+          <p:cNvPr id="6" name="Rounded Rectangle 5"/>
+          <p:cNvSpPr/>
           <p:nvPr/>
         </p:nvSpPr>
         <p:spPr>
           <a:xfrm>
-            <a:off x="731520" y="1280160"/>
-            <a:ext cx="6858000" cy="4937760"/>
-          </a:xfrm>
-          <a:prstGeom prst="rect">
-            <a:avLst/>
-          </a:prstGeom>
-          <a:noFill/>
-        </p:spPr>
-        <p:txBody>
-          <a:bodyPr wrap="square">
-            <a:spAutoFit/>
-          </a:bodyPr>
-          <a:lstStyle/>
-          <a:p>
-            <a:pPr>
-              <a:spcAft>
-                <a:spcPts val="200"/>
-              </a:spcAft>
-              <a:defRPr b="1" sz="1500">
-                <a:solidFill>
-                  <a:srgbClr val="0F1E4A"/>
-                </a:solidFill>
-              </a:defRPr>
-            </a:pPr>
-            <a:r>
-              <a:t>• Link-Layer Direct Access</a:t>
-            </a:r>
-          </a:p>
-          <a:p>
-            <a:pPr>
-              <a:spcAft>
-                <a:spcPts val="800"/>
-              </a:spcAft>
-              <a:defRPr sz="1300">
-                <a:solidFill>
-                  <a:srgbClr val="1E293B"/>
-                </a:solidFill>
-              </a:defRPr>
-            </a:pPr>
-            <a:r>
-              <a:t>   Standard sockets operate at L4/L3. Link-layer raw sockets allow application programs to send and receive raw L2 Ethernet frames directly bypassing kernel IP stack.</a:t>
-            </a:r>
-          </a:p>
-          <a:p>
-            <a:pPr>
-              <a:spcAft>
-                <a:spcPts val="200"/>
-              </a:spcAft>
-              <a:defRPr b="1" sz="1500">
-                <a:solidFill>
-                  <a:srgbClr val="0F1E4A"/>
-                </a:solidFill>
-              </a:defRPr>
-            </a:pPr>
-            <a:r>
-              <a:t>• Legacy `SOCK_PACKET` vs Modern `PF_PACKET`</a:t>
-            </a:r>
-          </a:p>
-          <a:p>
-            <a:pPr>
-              <a:spcAft>
-                <a:spcPts val="800"/>
-              </a:spcAft>
-              <a:defRPr sz="1300">
-                <a:solidFill>
-                  <a:srgbClr val="1E293B"/>
-                </a:solidFill>
-              </a:defRPr>
-            </a:pPr>
-            <a:r>
-              <a:t>   `SOCK_PACKET` (Linux 2.0) passed device name in `sockaddr`. Replaced in modern Linux by `socket(PF_PACKET, SOCK_RAW, htons(ETH_P_ALL))` which provides cleaner device binding and hardware header access.</a:t>
-            </a:r>
-          </a:p>
-          <a:p>
-            <a:pPr>
-              <a:spcAft>
-                <a:spcPts val="200"/>
-              </a:spcAft>
-              <a:defRPr b="1" sz="1500">
-                <a:solidFill>
-                  <a:srgbClr val="0F1E4A"/>
-                </a:solidFill>
-              </a:defRPr>
-            </a:pPr>
-            <a:r>
-              <a:t>• `struct sockaddr_ll` Structure</a:t>
-            </a:r>
-          </a:p>
-          <a:p>
-            <a:pPr>
-              <a:spcAft>
-                <a:spcPts val="800"/>
-              </a:spcAft>
-              <a:defRPr sz="1300">
-                <a:solidFill>
-                  <a:srgbClr val="1E293B"/>
-                </a:solidFill>
-              </a:defRPr>
-            </a:pPr>
-            <a:r>
-              <a:t>   Socket address struct for link layer: `sll_family = AF_PACKET`, `sll_protocol = htons(ETH_P_ALL)`, `sll_ifindex` (interface index), `sll_hatype` (ARP hardware type), `sll_addr` (MAC address bytes).</a:t>
-            </a:r>
-          </a:p>
-          <a:p>
-            <a:pPr>
-              <a:spcAft>
-                <a:spcPts val="200"/>
-              </a:spcAft>
-              <a:defRPr b="1" sz="1500">
-                <a:solidFill>
-                  <a:srgbClr val="0F1E4A"/>
-                </a:solidFill>
-              </a:defRPr>
-            </a:pPr>
-            <a:r>
-              <a:t>• Promiscuous Mode Sniffing</a:t>
-            </a:r>
-          </a:p>
-          <a:p>
-            <a:pPr>
-              <a:spcAft>
-                <a:spcPts val="800"/>
-              </a:spcAft>
-              <a:defRPr sz="1300">
-                <a:solidFill>
-                  <a:srgbClr val="1E293B"/>
-                </a:solidFill>
-              </a:defRPr>
-            </a:pPr>
-            <a:r>
-              <a:t>   NIC configured with `IFF_PROMISC` flag captures ALL frames traversing the physical wire regardless of Destination MAC (used by Wireshark/tcpdump).</a:t>
-            </a:r>
-          </a:p>
-        </p:txBody>
-      </p:sp>
-      <p:sp>
-        <p:nvSpPr>
-          <p:cNvPr id="7" name="Rounded Rectangle 6"/>
-          <p:cNvSpPr/>
-          <p:nvPr/>
-        </p:nvSpPr>
-        <p:spPr>
-          <a:xfrm>
-            <a:off x="7955279" y="1280160"/>
-            <a:ext cx="3566160" cy="4846320"/>
+            <a:off x="731520" y="1234440"/>
+            <a:ext cx="6217920" cy="4892040"/>
           </a:xfrm>
           <a:prstGeom prst="roundRect">
             <a:avLst/>
           </a:prstGeom>
           <a:solidFill>
-            <a:srgbClr val="F1F5F9"/>
+            <a:srgbClr val="0F172A"/>
           </a:solidFill>
           <a:ln w="19050">
             <a:solidFill>
@@ -3631,14 +3627,14 @@
       </p:sp>
       <p:sp>
         <p:nvSpPr>
-          <p:cNvPr id="8" name="TextBox 7"/>
+          <p:cNvPr id="7" name="TextBox 6"/>
           <p:cNvSpPr txBox="1"/>
           <p:nvPr/>
         </p:nvSpPr>
         <p:spPr>
           <a:xfrm>
-            <a:off x="8138160" y="1417320"/>
-            <a:ext cx="3200400" cy="4572000"/>
+            <a:off x="868680" y="1325880"/>
+            <a:ext cx="5943600" cy="4663440"/>
           </a:xfrm>
           <a:prstGeom prst="rect">
             <a:avLst/>
@@ -3653,77 +3649,176 @@
           <a:p>
             <a:pPr>
               <a:spcAft>
-                <a:spcPts val="1000"/>
-              </a:spcAft>
-              <a:defRPr b="1" sz="1500">
-                <a:solidFill>
-                  <a:srgbClr val="0E7490"/>
-                </a:solidFill>
-              </a:defRPr>
-            </a:pPr>
-            <a:r>
-              <a:t>Hands-on Code Snip</a:t>
-            </a:r>
-          </a:p>
-          <a:p>
-            <a:pPr>
-              <a:spcAft>
                 <a:spcPts val="600"/>
               </a:spcAft>
-              <a:defRPr sz="1200">
-                <a:solidFill>
-                  <a:srgbClr val="1E293B"/>
+              <a:defRPr b="1" sz="1100">
+                <a:solidFill>
+                  <a:srgbClr val="D97706"/>
                 </a:solidFill>
               </a:defRPr>
             </a:pPr>
             <a:r>
-              <a:t>→ s = socket(PF_PACKET, SOCK_RAW, htons(ETH_P_ALL));</a:t>
+              <a:t>// Linux Socket &amp; Protocol Implementation</a:t>
             </a:r>
           </a:p>
           <a:p>
             <a:pPr>
-              <a:spcAft>
-                <a:spcPts val="600"/>
-              </a:spcAft>
-              <a:defRPr sz="1200">
-                <a:solidFill>
-                  <a:srgbClr val="1E293B"/>
-                </a:solidFill>
+              <a:defRPr sz="1050">
+                <a:solidFill>
+                  <a:srgbClr val="E2E8F0"/>
+                </a:solidFill>
+                <a:latin typeface="Consolas"/>
               </a:defRPr>
             </a:pPr>
             <a:r>
-              <a:t>→ recvfrom(s, buffer, 2048, 0, NULL, NULL);</a:t>
-            </a:r>
-          </a:p>
-          <a:p>
-            <a:pPr>
-              <a:spcAft>
-                <a:spcPts val="600"/>
-              </a:spcAft>
-              <a:defRPr sz="1200">
-                <a:solidFill>
-                  <a:srgbClr val="1E293B"/>
-                </a:solidFill>
-              </a:defRPr>
-            </a:pPr>
-            <a:r>
-              <a:t>→ struct ethhdr *eth = (struct ethhdr*)buffer;</a:t>
-            </a:r>
-          </a:p>
-          <a:p>
-            <a:pPr>
-              <a:spcAft>
-                <a:spcPts val="600"/>
-              </a:spcAft>
-              <a:defRPr sz="1200">
-                <a:solidFill>
-                  <a:srgbClr val="1E293B"/>
-                </a:solidFill>
-              </a:defRPr>
-            </a:pPr>
-            <a:r>
-              <a:t>→ All KTU CO4 Topics Covered</a:t>
-            </a:r>
+              <a:t>#include &lt;sys/socket.h&gt;</a:t>
+            </a:r>
+            <a:br/>
+            <a:r>
+              <a:t>#include &lt;netinet/ether.h&gt;</a:t>
+            </a:r>
+            <a:br/>
+            <a:r>
+              <a:t>#include &lt;net/if.h&gt;</a:t>
+            </a:r>
+            <a:br/>
+            <a:r>
+              <a:t>#include &lt;sys/ioctl.h&gt;</a:t>
+            </a:r>
+            <a:br/>
+            <a:br/>
+            <a:r>
+              <a:t>int main() {</a:t>
+            </a:r>
+            <a:br/>
+            <a:r>
+              <a:t>    // 1. Create Raw Packet Socket to capture all Ethernet frames</a:t>
+            </a:r>
+            <a:br/>
+            <a:r>
+              <a:t>    int raw_sock = socket(AF_PACKET, SOCK_RAW, htons(ETH_P_ALL));</a:t>
+            </a:r>
+            <a:br/>
+            <a:r>
+              <a:t>    </a:t>
+            </a:r>
+            <a:br/>
+            <a:r>
+              <a:t>    // 2. Enable Promiscuous Mode on network interface eth0</a:t>
+            </a:r>
+            <a:br/>
+            <a:r>
+              <a:t>    struct ifreq ifr;</a:t>
+            </a:r>
+            <a:br/>
+            <a:r>
+              <a:t>    strcpy(ifr.ifr_name, "eth0");</a:t>
+            </a:r>
+            <a:br/>
+            <a:r>
+              <a:t>    ioctl(raw_sock, SIOCGIFFLAGS, &amp;ifr);</a:t>
+            </a:r>
+            <a:br/>
+            <a:r>
+              <a:t>    ifr.ifr_flags |= IFF_PROMISC;</a:t>
+            </a:r>
+            <a:br/>
+            <a:r>
+              <a:t>    ioctl(raw_sock, SIOCSIFFLAGS, &amp;ifr);</a:t>
+            </a:r>
+            <a:br/>
+            <a:r>
+              <a:t>    </a:t>
+            </a:r>
+            <a:br/>
+            <a:r>
+              <a:t>    // 3. Capture and Dissect Raw Ethernet Frame</a:t>
+            </a:r>
+            <a:br/>
+            <a:r>
+              <a:t>    unsigned char buffer[2048];</a:t>
+            </a:r>
+            <a:br/>
+            <a:r>
+              <a:t>    while (1) {</a:t>
+            </a:r>
+            <a:br/>
+            <a:r>
+              <a:t>        int len = recvfrom(raw_sock, buffer, sizeof(buffer), 0, NULL, NULL);</a:t>
+            </a:r>
+            <a:br/>
+            <a:r>
+              <a:t>        struct ether_header *eth = (struct ether_header *)buffer;</a:t>
+            </a:r>
+            <a:br/>
+            <a:r>
+              <a:t>        printf("Src MAC: %s -&gt; Dst MAC: %s | Protocol: 0x%04X\n",</a:t>
+            </a:r>
+            <a:br/>
+            <a:r>
+              <a:t>               ether_ntoa((struct ether_addr *)eth-&gt;ether_shost),</a:t>
+            </a:r>
+            <a:br/>
+            <a:r>
+              <a:t>               ether_ntoa((struct ether_addr *)eth-&gt;ether_dhost),</a:t>
+            </a:r>
+            <a:br/>
+            <a:r>
+              <a:t>               ntohs(eth-&gt;ether_type));</a:t>
+            </a:r>
+            <a:br/>
+            <a:r>
+              <a:t>    }</a:t>
+            </a:r>
+            <a:br/>
+            <a:r>
+              <a:t>}</a:t>
+            </a:r>
+          </a:p>
+        </p:txBody>
+      </p:sp>
+      <p:sp>
+        <p:nvSpPr>
+          <p:cNvPr id="8" name="Rounded Rectangle 7"/>
+          <p:cNvSpPr/>
+          <p:nvPr/>
+        </p:nvSpPr>
+        <p:spPr>
+          <a:xfrm>
+            <a:off x="7132320" y="1234440"/>
+            <a:ext cx="4389120" cy="4892040"/>
+          </a:xfrm>
+          <a:prstGeom prst="roundRect">
+            <a:avLst/>
+          </a:prstGeom>
+          <a:solidFill>
+            <a:srgbClr val="F8FAFC"/>
+          </a:solidFill>
+          <a:ln w="19050">
+            <a:solidFill>
+              <a:srgbClr val="0F1E4A"/>
+            </a:solidFill>
+          </a:ln>
+        </p:spPr>
+        <p:style>
+          <a:lnRef idx="1">
+            <a:schemeClr val="accent1"/>
+          </a:lnRef>
+          <a:fillRef idx="3">
+            <a:schemeClr val="accent1"/>
+          </a:fillRef>
+          <a:effectRef idx="2">
+            <a:schemeClr val="accent1"/>
+          </a:effectRef>
+          <a:fontRef idx="minor">
+            <a:schemeClr val="lt1"/>
+          </a:fontRef>
+        </p:style>
+        <p:txBody>
+          <a:bodyPr rtlCol="0" anchor="ctr"/>
+          <a:lstStyle/>
+          <a:p>
+            <a:pPr algn="ctr"/>
           </a:p>
         </p:txBody>
       </p:sp>
@@ -3735,8 +3830,8 @@
         </p:nvSpPr>
         <p:spPr>
           <a:xfrm>
-            <a:off x="731520" y="6309360"/>
-            <a:ext cx="10789920" cy="365760"/>
+            <a:off x="7315200" y="1371600"/>
+            <a:ext cx="4023360" cy="4572000"/>
           </a:xfrm>
           <a:prstGeom prst="rect">
             <a:avLst/>
@@ -3744,6 +3839,116 @@
           <a:noFill/>
         </p:spPr>
         <p:txBody>
+          <a:bodyPr wrap="square">
+            <a:spAutoFit/>
+          </a:bodyPr>
+          <a:lstStyle/>
+          <a:p>
+            <a:pPr>
+              <a:spcAft>
+                <a:spcPts val="800"/>
+              </a:spcAft>
+              <a:defRPr b="1" sz="1400">
+                <a:solidFill>
+                  <a:srgbClr val="0F1E4A"/>
+                </a:solidFill>
+              </a:defRPr>
+            </a:pPr>
+            <a:r>
+              <a:t>⚙️ System Call &amp; Execution Workflow</a:t>
+            </a:r>
+          </a:p>
+          <a:p>
+            <a:pPr>
+              <a:spcAft>
+                <a:spcPts val="600"/>
+              </a:spcAft>
+              <a:defRPr sz="1200">
+                <a:solidFill>
+                  <a:srgbClr val="0F172A"/>
+                </a:solidFill>
+              </a:defRPr>
+            </a:pPr>
+            <a:r>
+              <a:t>• `AF_PACKET` / `PF_PACKET`: Linux-specific socket domain allowing direct interaction with Layer 2 device drivers, bypassing the standard kernel TCP/IP protocol stack entirely.</a:t>
+            </a:r>
+          </a:p>
+          <a:p>
+            <a:pPr>
+              <a:spcAft>
+                <a:spcPts val="600"/>
+              </a:spcAft>
+              <a:defRPr sz="1200">
+                <a:solidFill>
+                  <a:srgbClr val="0F172A"/>
+                </a:solidFill>
+              </a:defRPr>
+            </a:pPr>
+            <a:r>
+              <a:t>• `SOCK_RAW` vs `SOCK_DGRAM`: `SOCK_RAW` provides raw Ethernet frames including L2 header and trailer; `SOCK_DGRAM` provides frames with L2 header stripped.</a:t>
+            </a:r>
+          </a:p>
+          <a:p>
+            <a:pPr>
+              <a:spcAft>
+                <a:spcPts val="600"/>
+              </a:spcAft>
+              <a:defRPr sz="1200">
+                <a:solidFill>
+                  <a:srgbClr val="0F172A"/>
+                </a:solidFill>
+              </a:defRPr>
+            </a:pPr>
+            <a:r>
+              <a:t>• Protocol Filter `ETH_P_ALL`: Captures all incoming and outgoing frames (IPv4, ARP, IPv6, STP, VLAN).</a:t>
+            </a:r>
+          </a:p>
+          <a:p>
+            <a:pPr>
+              <a:spcAft>
+                <a:spcPts val="600"/>
+              </a:spcAft>
+              <a:defRPr sz="1200">
+                <a:solidFill>
+                  <a:srgbClr val="0F172A"/>
+                </a:solidFill>
+              </a:defRPr>
+            </a:pPr>
+            <a:r>
+              <a:t>• Promiscuous Mode (`IFF_PROMISC`): Instructs the NIC hardware to disable MAC address filtering and deliver all overheard frames on the physical wire to the OS.</a:t>
+            </a:r>
+          </a:p>
+          <a:p>
+            <a:pPr>
+              <a:defRPr b="1" sz="1150">
+                <a:solidFill>
+                  <a:srgbClr val="0E7490"/>
+                </a:solidFill>
+              </a:defRPr>
+            </a:pPr>
+            <a:r>
+              <a:t>💡 Hands-on Insight: Used by network diagnostic tools like Wireshark, tcpdump, and custom IDS packet analysis engines.</a:t>
+            </a:r>
+          </a:p>
+        </p:txBody>
+      </p:sp>
+      <p:sp>
+        <p:nvSpPr>
+          <p:cNvPr id="10" name="TextBox 9"/>
+          <p:cNvSpPr txBox="1"/>
+          <p:nvPr/>
+        </p:nvSpPr>
+        <p:spPr>
+          <a:xfrm>
+            <a:off x="731520" y="6327648"/>
+            <a:ext cx="10789920" cy="320040"/>
+          </a:xfrm>
+          <a:prstGeom prst="rect">
+            <a:avLst/>
+          </a:prstGeom>
+          <a:noFill/>
+        </p:spPr>
+        <p:txBody>
           <a:bodyPr wrap="none">
             <a:spAutoFit/>
           </a:bodyPr>
@@ -3758,6 +3963,526 @@
             </a:pPr>
             <a:r>
               <a:t>PCCST501 Computer Networks | KTU 2024 Scheme | Prof. Anju Markose | Assistant Professor, Dept. of CSE | VJCET</a:t>
+            </a:r>
+          </a:p>
+        </p:txBody>
+      </p:sp>
+      <p:sp>
+        <p:nvSpPr>
+          <p:cNvPr id="11" name="TextBox 10"/>
+          <p:cNvSpPr txBox="1"/>
+          <p:nvPr/>
+        </p:nvSpPr>
+        <p:spPr>
+          <a:xfrm>
+            <a:off x="6858000" y="6327648"/>
+            <a:ext cx="4572000" cy="320040"/>
+          </a:xfrm>
+          <a:prstGeom prst="rect">
+            <a:avLst/>
+          </a:prstGeom>
+          <a:noFill/>
+        </p:spPr>
+        <p:txBody>
+          <a:bodyPr wrap="none">
+            <a:spAutoFit/>
+          </a:bodyPr>
+          <a:lstStyle/>
+          <a:p>
+            <a:pPr algn="r">
+              <a:defRPr sz="950">
+                <a:solidFill>
+                  <a:srgbClr val="64748B"/>
+                </a:solidFill>
+              </a:defRPr>
+            </a:pPr>
+            <a:r>
+              <a:t>Dept. of CSE, VJCET</a:t>
+            </a:r>
+          </a:p>
+        </p:txBody>
+      </p:sp>
+    </p:spTree>
+  </p:cSld>
+  <p:clrMapOvr>
+    <a:masterClrMapping/>
+  </p:clrMapOvr>
+</p:sld>
+</file>
+
+<file path=ppt/slides/slide3.xml><?xml version="1.0" encoding="utf-8"?>
+<p:sld xmlns:a="http://schemas.openxmlformats.org/drawingml/2006/main" xmlns:p="http://schemas.openxmlformats.org/presentationml/2006/main" xmlns:r="http://schemas.openxmlformats.org/officeDocument/2006/relationships">
+  <p:cSld>
+    <p:spTree>
+      <p:nvGrpSpPr>
+        <p:cNvPr id="1" name=""/>
+        <p:cNvGrpSpPr/>
+        <p:nvPr/>
+      </p:nvGrpSpPr>
+      <p:grpSpPr/>
+      <p:sp>
+        <p:nvSpPr>
+          <p:cNvPr id="2" name="Rectangle 1"/>
+          <p:cNvSpPr/>
+          <p:nvPr/>
+        </p:nvSpPr>
+        <p:spPr>
+          <a:xfrm>
+            <a:off x="0" y="0"/>
+            <a:ext cx="12191695" cy="1005840"/>
+          </a:xfrm>
+          <a:prstGeom prst="rect">
+            <a:avLst/>
+          </a:prstGeom>
+          <a:solidFill>
+            <a:srgbClr val="0F1E4A"/>
+          </a:solidFill>
+          <a:ln>
+            <a:noFill/>
+          </a:ln>
+        </p:spPr>
+        <p:style>
+          <a:lnRef idx="1">
+            <a:schemeClr val="accent1"/>
+          </a:lnRef>
+          <a:fillRef idx="3">
+            <a:schemeClr val="accent1"/>
+          </a:fillRef>
+          <a:effectRef idx="2">
+            <a:schemeClr val="accent1"/>
+          </a:effectRef>
+          <a:fontRef idx="minor">
+            <a:schemeClr val="lt1"/>
+          </a:fontRef>
+        </p:style>
+        <p:txBody>
+          <a:bodyPr rtlCol="0" anchor="ctr"/>
+          <a:lstStyle/>
+          <a:p>
+            <a:pPr algn="ctr"/>
+          </a:p>
+        </p:txBody>
+      </p:sp>
+      <p:sp>
+        <p:nvSpPr>
+          <p:cNvPr id="3" name="Rectangle 2"/>
+          <p:cNvSpPr/>
+          <p:nvPr/>
+        </p:nvSpPr>
+        <p:spPr>
+          <a:xfrm>
+            <a:off x="0" y="969264"/>
+            <a:ext cx="12191695" cy="36576"/>
+          </a:xfrm>
+          <a:prstGeom prst="rect">
+            <a:avLst/>
+          </a:prstGeom>
+          <a:solidFill>
+            <a:srgbClr val="D97706"/>
+          </a:solidFill>
+          <a:ln>
+            <a:noFill/>
+          </a:ln>
+        </p:spPr>
+        <p:style>
+          <a:lnRef idx="1">
+            <a:schemeClr val="accent1"/>
+          </a:lnRef>
+          <a:fillRef idx="3">
+            <a:schemeClr val="accent1"/>
+          </a:fillRef>
+          <a:effectRef idx="2">
+            <a:schemeClr val="accent1"/>
+          </a:effectRef>
+          <a:fontRef idx="minor">
+            <a:schemeClr val="lt1"/>
+          </a:fontRef>
+        </p:style>
+        <p:txBody>
+          <a:bodyPr rtlCol="0" anchor="ctr"/>
+          <a:lstStyle/>
+          <a:p>
+            <a:pPr algn="ctr"/>
+          </a:p>
+        </p:txBody>
+      </p:sp>
+      <p:sp>
+        <p:nvSpPr>
+          <p:cNvPr id="4" name="TextBox 3"/>
+          <p:cNvSpPr txBox="1"/>
+          <p:nvPr/>
+        </p:nvSpPr>
+        <p:spPr>
+          <a:xfrm>
+            <a:off x="731520" y="164592"/>
+            <a:ext cx="8412480" cy="685800"/>
+          </a:xfrm>
+          <a:prstGeom prst="rect">
+            <a:avLst/>
+          </a:prstGeom>
+          <a:noFill/>
+        </p:spPr>
+        <p:txBody>
+          <a:bodyPr wrap="none">
+            <a:spAutoFit/>
+          </a:bodyPr>
+          <a:lstStyle/>
+          <a:p>
+            <a:pPr>
+              <a:defRPr b="1" sz="2100">
+                <a:solidFill>
+                  <a:srgbClr val="F8FAFC"/>
+                </a:solidFill>
+              </a:defRPr>
+            </a:pPr>
+            <a:r>
+              <a:t>🎯 Exam Booster &amp; Review: Linux Raw Sockets</a:t>
+            </a:r>
+          </a:p>
+        </p:txBody>
+      </p:sp>
+      <p:sp>
+        <p:nvSpPr>
+          <p:cNvPr id="5" name="TextBox 4"/>
+          <p:cNvSpPr txBox="1"/>
+          <p:nvPr/>
+        </p:nvSpPr>
+        <p:spPr>
+          <a:xfrm>
+            <a:off x="8229600" y="164592"/>
+            <a:ext cx="3291840" cy="685800"/>
+          </a:xfrm>
+          <a:prstGeom prst="rect">
+            <a:avLst/>
+          </a:prstGeom>
+          <a:noFill/>
+        </p:spPr>
+        <p:txBody>
+          <a:bodyPr wrap="none">
+            <a:spAutoFit/>
+          </a:bodyPr>
+          <a:lstStyle/>
+          <a:p>
+            <a:pPr algn="r">
+              <a:defRPr b="1" sz="1300">
+                <a:solidFill>
+                  <a:srgbClr val="D97706"/>
+                </a:solidFill>
+              </a:defRPr>
+            </a:pPr>
+            <a:r>
+              <a:t>M3.9</a:t>
+            </a:r>
+          </a:p>
+        </p:txBody>
+      </p:sp>
+      <p:sp>
+        <p:nvSpPr>
+          <p:cNvPr id="6" name="Rounded Rectangle 5"/>
+          <p:cNvSpPr/>
+          <p:nvPr/>
+        </p:nvSpPr>
+        <p:spPr>
+          <a:xfrm>
+            <a:off x="731520" y="1234440"/>
+            <a:ext cx="5303520" cy="4892040"/>
+          </a:xfrm>
+          <a:prstGeom prst="roundRect">
+            <a:avLst/>
+          </a:prstGeom>
+          <a:solidFill>
+            <a:srgbClr val="FEF3C7"/>
+          </a:solidFill>
+          <a:ln w="19050">
+            <a:solidFill>
+              <a:srgbClr val="D97706"/>
+            </a:solidFill>
+          </a:ln>
+        </p:spPr>
+        <p:style>
+          <a:lnRef idx="1">
+            <a:schemeClr val="accent1"/>
+          </a:lnRef>
+          <a:fillRef idx="3">
+            <a:schemeClr val="accent1"/>
+          </a:fillRef>
+          <a:effectRef idx="2">
+            <a:schemeClr val="accent1"/>
+          </a:effectRef>
+          <a:fontRef idx="minor">
+            <a:schemeClr val="lt1"/>
+          </a:fontRef>
+        </p:style>
+        <p:txBody>
+          <a:bodyPr rtlCol="0" anchor="ctr"/>
+          <a:lstStyle/>
+          <a:p>
+            <a:pPr algn="ctr"/>
+          </a:p>
+        </p:txBody>
+      </p:sp>
+      <p:sp>
+        <p:nvSpPr>
+          <p:cNvPr id="7" name="TextBox 6"/>
+          <p:cNvSpPr txBox="1"/>
+          <p:nvPr/>
+        </p:nvSpPr>
+        <p:spPr>
+          <a:xfrm>
+            <a:off x="914400" y="1371600"/>
+            <a:ext cx="4937760" cy="4572000"/>
+          </a:xfrm>
+          <a:prstGeom prst="rect">
+            <a:avLst/>
+          </a:prstGeom>
+          <a:noFill/>
+        </p:spPr>
+        <p:txBody>
+          <a:bodyPr wrap="square">
+            <a:spAutoFit/>
+          </a:bodyPr>
+          <a:lstStyle/>
+          <a:p>
+            <a:pPr>
+              <a:spcAft>
+                <a:spcPts val="1000"/>
+              </a:spcAft>
+              <a:defRPr b="1" sz="1450">
+                <a:solidFill>
+                  <a:srgbClr val="D97706"/>
+                </a:solidFill>
+              </a:defRPr>
+            </a:pPr>
+            <a:r>
+              <a:t>📚 KTU High-Yield Questions (K3 Apply)</a:t>
+            </a:r>
+          </a:p>
+          <a:p>
+            <a:pPr>
+              <a:spcAft>
+                <a:spcPts val="700"/>
+              </a:spcAft>
+              <a:defRPr sz="1200">
+                <a:solidFill>
+                  <a:srgbClr val="0F172A"/>
+                </a:solidFill>
+              </a:defRPr>
+            </a:pPr>
+            <a:r>
+              <a:t>Q: Explain the difference between standard Berkeley sockets (`AF_INET`) and Linux packet sockets (`AF_PACKET`). (6 Marks)</a:t>
+            </a:r>
+          </a:p>
+          <a:p>
+            <a:pPr>
+              <a:spcAft>
+                <a:spcPts val="700"/>
+              </a:spcAft>
+              <a:defRPr sz="1200">
+                <a:solidFill>
+                  <a:srgbClr val="0F172A"/>
+                </a:solidFill>
+              </a:defRPr>
+            </a:pPr>
+            <a:r>
+              <a:t>Q: Write a C program using `PF_PACKET` and `SOCK_RAW` to capture Ethernet frames and extract Source and Destination MAC addresses. (8 Marks)</a:t>
+            </a:r>
+          </a:p>
+        </p:txBody>
+      </p:sp>
+      <p:sp>
+        <p:nvSpPr>
+          <p:cNvPr id="8" name="Rounded Rectangle 7"/>
+          <p:cNvSpPr/>
+          <p:nvPr/>
+        </p:nvSpPr>
+        <p:spPr>
+          <a:xfrm>
+            <a:off x="6309360" y="1234440"/>
+            <a:ext cx="5212080" cy="4892040"/>
+          </a:xfrm>
+          <a:prstGeom prst="roundRect">
+            <a:avLst/>
+          </a:prstGeom>
+          <a:solidFill>
+            <a:srgbClr val="EEF2FF"/>
+          </a:solidFill>
+          <a:ln w="19050">
+            <a:solidFill>
+              <a:srgbClr val="0E7490"/>
+            </a:solidFill>
+          </a:ln>
+        </p:spPr>
+        <p:style>
+          <a:lnRef idx="1">
+            <a:schemeClr val="accent1"/>
+          </a:lnRef>
+          <a:fillRef idx="3">
+            <a:schemeClr val="accent1"/>
+          </a:fillRef>
+          <a:effectRef idx="2">
+            <a:schemeClr val="accent1"/>
+          </a:effectRef>
+          <a:fontRef idx="minor">
+            <a:schemeClr val="lt1"/>
+          </a:fontRef>
+        </p:style>
+        <p:txBody>
+          <a:bodyPr rtlCol="0" anchor="ctr"/>
+          <a:lstStyle/>
+          <a:p>
+            <a:pPr algn="ctr"/>
+          </a:p>
+        </p:txBody>
+      </p:sp>
+      <p:sp>
+        <p:nvSpPr>
+          <p:cNvPr id="9" name="TextBox 8"/>
+          <p:cNvSpPr txBox="1"/>
+          <p:nvPr/>
+        </p:nvSpPr>
+        <p:spPr>
+          <a:xfrm>
+            <a:off x="6492240" y="1371600"/>
+            <a:ext cx="4846320" cy="4572000"/>
+          </a:xfrm>
+          <a:prstGeom prst="rect">
+            <a:avLst/>
+          </a:prstGeom>
+          <a:noFill/>
+        </p:spPr>
+        <p:txBody>
+          <a:bodyPr wrap="square">
+            <a:spAutoFit/>
+          </a:bodyPr>
+          <a:lstStyle/>
+          <a:p>
+            <a:pPr>
+              <a:spcAft>
+                <a:spcPts val="1000"/>
+              </a:spcAft>
+              <a:defRPr b="1" sz="1450">
+                <a:solidFill>
+                  <a:srgbClr val="0E7490"/>
+                </a:solidFill>
+              </a:defRPr>
+            </a:pPr>
+            <a:r>
+              <a:t>💡 Critical Conceptual Takeaways</a:t>
+            </a:r>
+          </a:p>
+          <a:p>
+            <a:pPr>
+              <a:spcAft>
+                <a:spcPts val="600"/>
+              </a:spcAft>
+              <a:defRPr sz="1200">
+                <a:solidFill>
+                  <a:srgbClr val="0F172A"/>
+                </a:solidFill>
+              </a:defRPr>
+            </a:pPr>
+            <a:r>
+              <a:t>✔ `AF_PACKET` gives direct access to Layer 2 raw Ethernet frames.</a:t>
+            </a:r>
+          </a:p>
+          <a:p>
+            <a:pPr>
+              <a:spcAft>
+                <a:spcPts val="600"/>
+              </a:spcAft>
+              <a:defRPr sz="1200">
+                <a:solidFill>
+                  <a:srgbClr val="0F172A"/>
+                </a:solidFill>
+              </a:defRPr>
+            </a:pPr>
+            <a:r>
+              <a:t>✔ Promiscuous mode captures all frames on the shared link regardless of destination MAC.</a:t>
+            </a:r>
+          </a:p>
+          <a:p>
+            <a:pPr>
+              <a:spcAft>
+                <a:spcPts val="600"/>
+              </a:spcAft>
+              <a:defRPr sz="1200">
+                <a:solidFill>
+                  <a:srgbClr val="0F172A"/>
+                </a:solidFill>
+              </a:defRPr>
+            </a:pPr>
+            <a:r>
+              <a:t>✔ `ETH_P_ALL` captures all Layer 3 protocol payloads.</a:t>
+            </a:r>
+          </a:p>
+        </p:txBody>
+      </p:sp>
+      <p:sp>
+        <p:nvSpPr>
+          <p:cNvPr id="10" name="TextBox 9"/>
+          <p:cNvSpPr txBox="1"/>
+          <p:nvPr/>
+        </p:nvSpPr>
+        <p:spPr>
+          <a:xfrm>
+            <a:off x="731520" y="6327648"/>
+            <a:ext cx="10789920" cy="320040"/>
+          </a:xfrm>
+          <a:prstGeom prst="rect">
+            <a:avLst/>
+          </a:prstGeom>
+          <a:noFill/>
+        </p:spPr>
+        <p:txBody>
+          <a:bodyPr wrap="none">
+            <a:spAutoFit/>
+          </a:bodyPr>
+          <a:lstStyle/>
+          <a:p>
+            <a:pPr>
+              <a:defRPr sz="950">
+                <a:solidFill>
+                  <a:srgbClr val="64748B"/>
+                </a:solidFill>
+              </a:defRPr>
+            </a:pPr>
+            <a:r>
+              <a:t>PCCST501 Computer Networks | KTU 2024 Scheme | Prof. Anju Markose | Assistant Professor, Dept. of CSE | VJCET</a:t>
+            </a:r>
+          </a:p>
+        </p:txBody>
+      </p:sp>
+      <p:sp>
+        <p:nvSpPr>
+          <p:cNvPr id="11" name="TextBox 10"/>
+          <p:cNvSpPr txBox="1"/>
+          <p:nvPr/>
+        </p:nvSpPr>
+        <p:spPr>
+          <a:xfrm>
+            <a:off x="6858000" y="6327648"/>
+            <a:ext cx="4572000" cy="320040"/>
+          </a:xfrm>
+          <a:prstGeom prst="rect">
+            <a:avLst/>
+          </a:prstGeom>
+          <a:noFill/>
+        </p:spPr>
+        <p:txBody>
+          <a:bodyPr wrap="none">
+            <a:spAutoFit/>
+          </a:bodyPr>
+          <a:lstStyle/>
+          <a:p>
+            <a:pPr algn="r">
+              <a:defRPr sz="950">
+                <a:solidFill>
+                  <a:srgbClr val="64748B"/>
+                </a:solidFill>
+              </a:defRPr>
+            </a:pPr>
+            <a:r>
+              <a:t>Dept. of CSE, VJCET</a:t>
             </a:r>
           </a:p>
         </p:txBody>
